--- a/roadmap.pptx
+++ b/roadmap.pptx
@@ -8242,6 +8242,654 @@
         </p:nvCxnSpPr>
         <p:spPr>
           <a:xfrm>
+            <a:off x="3886200" y="1161288"/>
+            <a:ext cx="0" cy="932688"/>
+          </a:xfrm>
+          <a:prstGeom prst="line">
+            <a:avLst/>
+          </a:prstGeom>
+          <a:ln w="19050">
+            <a:solidFill>
+              <a:srgbClr val="2F5597"/>
+            </a:solidFill>
+          </a:ln>
+        </p:spPr>
+        <p:style>
+          <a:lnRef idx="2">
+            <a:schemeClr val="accent1"/>
+          </a:lnRef>
+          <a:fillRef idx="0">
+            <a:schemeClr val="accent1"/>
+          </a:fillRef>
+          <a:effectRef idx="1">
+            <a:schemeClr val="accent1"/>
+          </a:effectRef>
+          <a:fontRef idx="minor">
+            <a:schemeClr val="tx1"/>
+          </a:fontRef>
+        </p:style>
+      </p:cxnSp>
+      <p:sp>
+        <p:nvSpPr>
+          <p:cNvPr id="115" name="Pentagon 114"/>
+          <p:cNvSpPr/>
+          <p:nvPr/>
+        </p:nvSpPr>
+        <p:spPr>
+          <a:xfrm>
+            <a:off x="3886200" y="1161288"/>
+            <a:ext cx="146304" cy="137160"/>
+          </a:xfrm>
+          <a:prstGeom prst="homePlate">
+            <a:avLst/>
+          </a:prstGeom>
+          <a:solidFill>
+            <a:srgbClr val="4472C4"/>
+          </a:solidFill>
+          <a:ln w="12700">
+            <a:solidFill>
+              <a:srgbClr val="2F5597"/>
+            </a:solidFill>
+          </a:ln>
+          <a:effectLst/>
+        </p:spPr>
+        <p:style>
+          <a:lnRef idx="1">
+            <a:schemeClr val="accent1"/>
+          </a:lnRef>
+          <a:fillRef idx="3">
+            <a:schemeClr val="accent1"/>
+          </a:fillRef>
+          <a:effectRef idx="2">
+            <a:schemeClr val="accent1"/>
+          </a:effectRef>
+          <a:fontRef idx="minor">
+            <a:schemeClr val="lt1"/>
+          </a:fontRef>
+        </p:style>
+        <p:txBody>
+          <a:bodyPr rtlCol="0" anchor="ctr" wrap="square" lIns="18000" rIns="18000" tIns="9000" bIns="9000"/>
+          <a:lstStyle/>
+          <a:p>
+            <a:pPr algn="ctr"/>
+          </a:p>
+        </p:txBody>
+      </p:sp>
+      <p:cxnSp>
+        <p:nvCxnSpPr>
+          <p:cNvPr id="116" name="Connector 115"/>
+          <p:cNvCxnSpPr/>
+          <p:nvPr/>
+        </p:nvCxnSpPr>
+        <p:spPr>
+          <a:xfrm>
+            <a:off x="7506869" y="1161288"/>
+            <a:ext cx="0" cy="932688"/>
+          </a:xfrm>
+          <a:prstGeom prst="line">
+            <a:avLst/>
+          </a:prstGeom>
+          <a:ln w="19050">
+            <a:solidFill>
+              <a:srgbClr val="7F0000"/>
+            </a:solidFill>
+          </a:ln>
+        </p:spPr>
+        <p:style>
+          <a:lnRef idx="2">
+            <a:schemeClr val="accent1"/>
+          </a:lnRef>
+          <a:fillRef idx="0">
+            <a:schemeClr val="accent1"/>
+          </a:fillRef>
+          <a:effectRef idx="1">
+            <a:schemeClr val="accent1"/>
+          </a:effectRef>
+          <a:fontRef idx="minor">
+            <a:schemeClr val="tx1"/>
+          </a:fontRef>
+        </p:style>
+      </p:cxnSp>
+      <p:sp>
+        <p:nvSpPr>
+          <p:cNvPr id="117" name="Pentagon 116"/>
+          <p:cNvSpPr/>
+          <p:nvPr/>
+        </p:nvSpPr>
+        <p:spPr>
+          <a:xfrm rot="10800000">
+            <a:off x="7360565" y="1161288"/>
+            <a:ext cx="146304" cy="137160"/>
+          </a:xfrm>
+          <a:prstGeom prst="homePlate">
+            <a:avLst/>
+          </a:prstGeom>
+          <a:solidFill>
+            <a:srgbClr val="C00000"/>
+          </a:solidFill>
+          <a:ln w="12700">
+            <a:solidFill>
+              <a:srgbClr val="7F0000"/>
+            </a:solidFill>
+          </a:ln>
+          <a:effectLst/>
+        </p:spPr>
+        <p:style>
+          <a:lnRef idx="1">
+            <a:schemeClr val="accent1"/>
+          </a:lnRef>
+          <a:fillRef idx="3">
+            <a:schemeClr val="accent1"/>
+          </a:fillRef>
+          <a:effectRef idx="2">
+            <a:schemeClr val="accent1"/>
+          </a:effectRef>
+          <a:fontRef idx="minor">
+            <a:schemeClr val="lt1"/>
+          </a:fontRef>
+        </p:style>
+        <p:txBody>
+          <a:bodyPr rtlCol="0" anchor="ctr" wrap="square" lIns="18000" rIns="18000" tIns="9000" bIns="9000"/>
+          <a:lstStyle/>
+          <a:p>
+            <a:pPr algn="ctr"/>
+          </a:p>
+        </p:txBody>
+      </p:sp>
+      <p:cxnSp>
+        <p:nvCxnSpPr>
+          <p:cNvPr id="118" name="Connector 117"/>
+          <p:cNvCxnSpPr/>
+          <p:nvPr/>
+        </p:nvCxnSpPr>
+        <p:spPr>
+          <a:xfrm>
+            <a:off x="6671330" y="2093976"/>
+            <a:ext cx="0" cy="932688"/>
+          </a:xfrm>
+          <a:prstGeom prst="line">
+            <a:avLst/>
+          </a:prstGeom>
+          <a:ln w="19050">
+            <a:solidFill>
+              <a:srgbClr val="2F5597"/>
+            </a:solidFill>
+          </a:ln>
+        </p:spPr>
+        <p:style>
+          <a:lnRef idx="2">
+            <a:schemeClr val="accent1"/>
+          </a:lnRef>
+          <a:fillRef idx="0">
+            <a:schemeClr val="accent1"/>
+          </a:fillRef>
+          <a:effectRef idx="1">
+            <a:schemeClr val="accent1"/>
+          </a:effectRef>
+          <a:fontRef idx="minor">
+            <a:schemeClr val="tx1"/>
+          </a:fontRef>
+        </p:style>
+      </p:cxnSp>
+      <p:sp>
+        <p:nvSpPr>
+          <p:cNvPr id="119" name="Pentagon 118"/>
+          <p:cNvSpPr/>
+          <p:nvPr/>
+        </p:nvSpPr>
+        <p:spPr>
+          <a:xfrm>
+            <a:off x="6671330" y="2093976"/>
+            <a:ext cx="146304" cy="137160"/>
+          </a:xfrm>
+          <a:prstGeom prst="homePlate">
+            <a:avLst/>
+          </a:prstGeom>
+          <a:solidFill>
+            <a:srgbClr val="4472C4"/>
+          </a:solidFill>
+          <a:ln w="12700">
+            <a:solidFill>
+              <a:srgbClr val="2F5597"/>
+            </a:solidFill>
+          </a:ln>
+          <a:effectLst/>
+        </p:spPr>
+        <p:style>
+          <a:lnRef idx="1">
+            <a:schemeClr val="accent1"/>
+          </a:lnRef>
+          <a:fillRef idx="3">
+            <a:schemeClr val="accent1"/>
+          </a:fillRef>
+          <a:effectRef idx="2">
+            <a:schemeClr val="accent1"/>
+          </a:effectRef>
+          <a:fontRef idx="minor">
+            <a:schemeClr val="lt1"/>
+          </a:fontRef>
+        </p:style>
+        <p:txBody>
+          <a:bodyPr rtlCol="0" anchor="ctr" wrap="square" lIns="18000" rIns="18000" tIns="9000" bIns="9000"/>
+          <a:lstStyle/>
+          <a:p>
+            <a:pPr algn="ctr"/>
+          </a:p>
+        </p:txBody>
+      </p:sp>
+      <p:cxnSp>
+        <p:nvCxnSpPr>
+          <p:cNvPr id="120" name="Connector 119"/>
+          <p:cNvCxnSpPr/>
+          <p:nvPr/>
+        </p:nvCxnSpPr>
+        <p:spPr>
+          <a:xfrm>
+            <a:off x="8620921" y="2093976"/>
+            <a:ext cx="0" cy="932688"/>
+          </a:xfrm>
+          <a:prstGeom prst="line">
+            <a:avLst/>
+          </a:prstGeom>
+          <a:ln w="19050">
+            <a:solidFill>
+              <a:srgbClr val="7F0000"/>
+            </a:solidFill>
+          </a:ln>
+        </p:spPr>
+        <p:style>
+          <a:lnRef idx="2">
+            <a:schemeClr val="accent1"/>
+          </a:lnRef>
+          <a:fillRef idx="0">
+            <a:schemeClr val="accent1"/>
+          </a:fillRef>
+          <a:effectRef idx="1">
+            <a:schemeClr val="accent1"/>
+          </a:effectRef>
+          <a:fontRef idx="minor">
+            <a:schemeClr val="tx1"/>
+          </a:fontRef>
+        </p:style>
+      </p:cxnSp>
+      <p:sp>
+        <p:nvSpPr>
+          <p:cNvPr id="121" name="Pentagon 120"/>
+          <p:cNvSpPr/>
+          <p:nvPr/>
+        </p:nvSpPr>
+        <p:spPr>
+          <a:xfrm rot="10800000">
+            <a:off x="8474617" y="2093976"/>
+            <a:ext cx="146304" cy="137160"/>
+          </a:xfrm>
+          <a:prstGeom prst="homePlate">
+            <a:avLst/>
+          </a:prstGeom>
+          <a:solidFill>
+            <a:srgbClr val="C00000"/>
+          </a:solidFill>
+          <a:ln w="12700">
+            <a:solidFill>
+              <a:srgbClr val="7F0000"/>
+            </a:solidFill>
+          </a:ln>
+          <a:effectLst/>
+        </p:spPr>
+        <p:style>
+          <a:lnRef idx="1">
+            <a:schemeClr val="accent1"/>
+          </a:lnRef>
+          <a:fillRef idx="3">
+            <a:schemeClr val="accent1"/>
+          </a:fillRef>
+          <a:effectRef idx="2">
+            <a:schemeClr val="accent1"/>
+          </a:effectRef>
+          <a:fontRef idx="minor">
+            <a:schemeClr val="lt1"/>
+          </a:fontRef>
+        </p:style>
+        <p:txBody>
+          <a:bodyPr rtlCol="0" anchor="ctr" wrap="square" lIns="18000" rIns="18000" tIns="9000" bIns="9000"/>
+          <a:lstStyle/>
+          <a:p>
+            <a:pPr algn="ctr"/>
+          </a:p>
+        </p:txBody>
+      </p:sp>
+      <p:cxnSp>
+        <p:nvCxnSpPr>
+          <p:cNvPr id="122" name="Connector 121"/>
+          <p:cNvCxnSpPr/>
+          <p:nvPr/>
+        </p:nvCxnSpPr>
+        <p:spPr>
+          <a:xfrm>
+            <a:off x="7228356" y="3026664"/>
+            <a:ext cx="0" cy="932688"/>
+          </a:xfrm>
+          <a:prstGeom prst="line">
+            <a:avLst/>
+          </a:prstGeom>
+          <a:ln w="19050">
+            <a:solidFill>
+              <a:srgbClr val="2F5597"/>
+            </a:solidFill>
+          </a:ln>
+        </p:spPr>
+        <p:style>
+          <a:lnRef idx="2">
+            <a:schemeClr val="accent1"/>
+          </a:lnRef>
+          <a:fillRef idx="0">
+            <a:schemeClr val="accent1"/>
+          </a:fillRef>
+          <a:effectRef idx="1">
+            <a:schemeClr val="accent1"/>
+          </a:effectRef>
+          <a:fontRef idx="minor">
+            <a:schemeClr val="tx1"/>
+          </a:fontRef>
+        </p:style>
+      </p:cxnSp>
+      <p:sp>
+        <p:nvSpPr>
+          <p:cNvPr id="123" name="Pentagon 122"/>
+          <p:cNvSpPr/>
+          <p:nvPr/>
+        </p:nvSpPr>
+        <p:spPr>
+          <a:xfrm>
+            <a:off x="7228356" y="3026664"/>
+            <a:ext cx="146304" cy="137160"/>
+          </a:xfrm>
+          <a:prstGeom prst="homePlate">
+            <a:avLst/>
+          </a:prstGeom>
+          <a:solidFill>
+            <a:srgbClr val="4472C4"/>
+          </a:solidFill>
+          <a:ln w="12700">
+            <a:solidFill>
+              <a:srgbClr val="2F5597"/>
+            </a:solidFill>
+          </a:ln>
+          <a:effectLst/>
+        </p:spPr>
+        <p:style>
+          <a:lnRef idx="1">
+            <a:schemeClr val="accent1"/>
+          </a:lnRef>
+          <a:fillRef idx="3">
+            <a:schemeClr val="accent1"/>
+          </a:fillRef>
+          <a:effectRef idx="2">
+            <a:schemeClr val="accent1"/>
+          </a:effectRef>
+          <a:fontRef idx="minor">
+            <a:schemeClr val="lt1"/>
+          </a:fontRef>
+        </p:style>
+        <p:txBody>
+          <a:bodyPr rtlCol="0" anchor="ctr" wrap="square" lIns="18000" rIns="18000" tIns="9000" bIns="9000"/>
+          <a:lstStyle/>
+          <a:p>
+            <a:pPr algn="ctr"/>
+          </a:p>
+        </p:txBody>
+      </p:sp>
+      <p:cxnSp>
+        <p:nvCxnSpPr>
+          <p:cNvPr id="124" name="Connector 123"/>
+          <p:cNvCxnSpPr/>
+          <p:nvPr/>
+        </p:nvCxnSpPr>
+        <p:spPr>
+          <a:xfrm>
+            <a:off x="10849025" y="3026664"/>
+            <a:ext cx="0" cy="932688"/>
+          </a:xfrm>
+          <a:prstGeom prst="line">
+            <a:avLst/>
+          </a:prstGeom>
+          <a:ln w="19050">
+            <a:solidFill>
+              <a:srgbClr val="7F0000"/>
+            </a:solidFill>
+          </a:ln>
+        </p:spPr>
+        <p:style>
+          <a:lnRef idx="2">
+            <a:schemeClr val="accent1"/>
+          </a:lnRef>
+          <a:fillRef idx="0">
+            <a:schemeClr val="accent1"/>
+          </a:fillRef>
+          <a:effectRef idx="1">
+            <a:schemeClr val="accent1"/>
+          </a:effectRef>
+          <a:fontRef idx="minor">
+            <a:schemeClr val="tx1"/>
+          </a:fontRef>
+        </p:style>
+      </p:cxnSp>
+      <p:sp>
+        <p:nvSpPr>
+          <p:cNvPr id="125" name="Pentagon 124"/>
+          <p:cNvSpPr/>
+          <p:nvPr/>
+        </p:nvSpPr>
+        <p:spPr>
+          <a:xfrm rot="10800000">
+            <a:off x="10702721" y="3026664"/>
+            <a:ext cx="146304" cy="137160"/>
+          </a:xfrm>
+          <a:prstGeom prst="homePlate">
+            <a:avLst/>
+          </a:prstGeom>
+          <a:solidFill>
+            <a:srgbClr val="C00000"/>
+          </a:solidFill>
+          <a:ln w="12700">
+            <a:solidFill>
+              <a:srgbClr val="7F0000"/>
+            </a:solidFill>
+          </a:ln>
+          <a:effectLst/>
+        </p:spPr>
+        <p:style>
+          <a:lnRef idx="1">
+            <a:schemeClr val="accent1"/>
+          </a:lnRef>
+          <a:fillRef idx="3">
+            <a:schemeClr val="accent1"/>
+          </a:fillRef>
+          <a:effectRef idx="2">
+            <a:schemeClr val="accent1"/>
+          </a:effectRef>
+          <a:fontRef idx="minor">
+            <a:schemeClr val="lt1"/>
+          </a:fontRef>
+        </p:style>
+        <p:txBody>
+          <a:bodyPr rtlCol="0" anchor="ctr" wrap="square" lIns="18000" rIns="18000" tIns="9000" bIns="9000"/>
+          <a:lstStyle/>
+          <a:p>
+            <a:pPr algn="ctr"/>
+          </a:p>
+        </p:txBody>
+      </p:sp>
+      <p:cxnSp>
+        <p:nvCxnSpPr>
+          <p:cNvPr id="126" name="Connector 125"/>
+          <p:cNvCxnSpPr/>
+          <p:nvPr/>
+        </p:nvCxnSpPr>
+        <p:spPr>
+          <a:xfrm>
+            <a:off x="10013486" y="3959352"/>
+            <a:ext cx="0" cy="932688"/>
+          </a:xfrm>
+          <a:prstGeom prst="line">
+            <a:avLst/>
+          </a:prstGeom>
+          <a:ln w="19050">
+            <a:solidFill>
+              <a:srgbClr val="2F5597"/>
+            </a:solidFill>
+          </a:ln>
+        </p:spPr>
+        <p:style>
+          <a:lnRef idx="2">
+            <a:schemeClr val="accent1"/>
+          </a:lnRef>
+          <a:fillRef idx="0">
+            <a:schemeClr val="accent1"/>
+          </a:fillRef>
+          <a:effectRef idx="1">
+            <a:schemeClr val="accent1"/>
+          </a:effectRef>
+          <a:fontRef idx="minor">
+            <a:schemeClr val="tx1"/>
+          </a:fontRef>
+        </p:style>
+      </p:cxnSp>
+      <p:sp>
+        <p:nvSpPr>
+          <p:cNvPr id="127" name="Pentagon 126"/>
+          <p:cNvSpPr/>
+          <p:nvPr/>
+        </p:nvSpPr>
+        <p:spPr>
+          <a:xfrm>
+            <a:off x="10013486" y="3959352"/>
+            <a:ext cx="146304" cy="137160"/>
+          </a:xfrm>
+          <a:prstGeom prst="homePlate">
+            <a:avLst/>
+          </a:prstGeom>
+          <a:solidFill>
+            <a:srgbClr val="4472C4"/>
+          </a:solidFill>
+          <a:ln w="12700">
+            <a:solidFill>
+              <a:srgbClr val="2F5597"/>
+            </a:solidFill>
+          </a:ln>
+          <a:effectLst/>
+        </p:spPr>
+        <p:style>
+          <a:lnRef idx="1">
+            <a:schemeClr val="accent1"/>
+          </a:lnRef>
+          <a:fillRef idx="3">
+            <a:schemeClr val="accent1"/>
+          </a:fillRef>
+          <a:effectRef idx="2">
+            <a:schemeClr val="accent1"/>
+          </a:effectRef>
+          <a:fontRef idx="minor">
+            <a:schemeClr val="lt1"/>
+          </a:fontRef>
+        </p:style>
+        <p:txBody>
+          <a:bodyPr rtlCol="0" anchor="ctr" wrap="square" lIns="18000" rIns="18000" tIns="9000" bIns="9000"/>
+          <a:lstStyle/>
+          <a:p>
+            <a:pPr algn="ctr"/>
+          </a:p>
+        </p:txBody>
+      </p:sp>
+      <p:cxnSp>
+        <p:nvCxnSpPr>
+          <p:cNvPr id="128" name="Connector 127"/>
+          <p:cNvCxnSpPr/>
+          <p:nvPr/>
+        </p:nvCxnSpPr>
+        <p:spPr>
+          <a:xfrm>
+            <a:off x="11963077" y="3959352"/>
+            <a:ext cx="0" cy="932688"/>
+          </a:xfrm>
+          <a:prstGeom prst="line">
+            <a:avLst/>
+          </a:prstGeom>
+          <a:ln w="19050">
+            <a:solidFill>
+              <a:srgbClr val="7F0000"/>
+            </a:solidFill>
+          </a:ln>
+        </p:spPr>
+        <p:style>
+          <a:lnRef idx="2">
+            <a:schemeClr val="accent1"/>
+          </a:lnRef>
+          <a:fillRef idx="0">
+            <a:schemeClr val="accent1"/>
+          </a:fillRef>
+          <a:effectRef idx="1">
+            <a:schemeClr val="accent1"/>
+          </a:effectRef>
+          <a:fontRef idx="minor">
+            <a:schemeClr val="tx1"/>
+          </a:fontRef>
+        </p:style>
+      </p:cxnSp>
+      <p:sp>
+        <p:nvSpPr>
+          <p:cNvPr id="129" name="Pentagon 128"/>
+          <p:cNvSpPr/>
+          <p:nvPr/>
+        </p:nvSpPr>
+        <p:spPr>
+          <a:xfrm rot="10800000">
+            <a:off x="11816773" y="3959352"/>
+            <a:ext cx="146304" cy="137160"/>
+          </a:xfrm>
+          <a:prstGeom prst="homePlate">
+            <a:avLst/>
+          </a:prstGeom>
+          <a:solidFill>
+            <a:srgbClr val="C00000"/>
+          </a:solidFill>
+          <a:ln w="12700">
+            <a:solidFill>
+              <a:srgbClr val="7F0000"/>
+            </a:solidFill>
+          </a:ln>
+          <a:effectLst/>
+        </p:spPr>
+        <p:style>
+          <a:lnRef idx="1">
+            <a:schemeClr val="accent1"/>
+          </a:lnRef>
+          <a:fillRef idx="3">
+            <a:schemeClr val="accent1"/>
+          </a:fillRef>
+          <a:effectRef idx="2">
+            <a:schemeClr val="accent1"/>
+          </a:effectRef>
+          <a:fontRef idx="minor">
+            <a:schemeClr val="lt1"/>
+          </a:fontRef>
+        </p:style>
+        <p:txBody>
+          <a:bodyPr rtlCol="0" anchor="ctr" wrap="square" lIns="18000" rIns="18000" tIns="9000" bIns="9000"/>
+          <a:lstStyle/>
+          <a:p>
+            <a:pPr algn="ctr"/>
+          </a:p>
+        </p:txBody>
+      </p:sp>
+      <p:cxnSp>
+        <p:nvCxnSpPr>
+          <p:cNvPr id="130" name="Connector 129"/>
+          <p:cNvCxnSpPr/>
+          <p:nvPr/>
+        </p:nvCxnSpPr>
+        <p:spPr>
+          <a:xfrm>
             <a:off x="4025456" y="1161288"/>
             <a:ext cx="0" cy="3730752"/>
           </a:xfrm>
@@ -8271,7 +8919,7 @@
       </p:cxnSp>
       <p:cxnSp>
         <p:nvCxnSpPr>
-          <p:cNvPr id="115" name="Connector 114"/>
+          <p:cNvPr id="131" name="Connector 130"/>
           <p:cNvCxnSpPr/>
           <p:nvPr/>
         </p:nvCxnSpPr>
@@ -8306,7 +8954,7 @@
       </p:cxnSp>
       <p:sp>
         <p:nvSpPr>
-          <p:cNvPr id="116" name="Rectangle 115"/>
+          <p:cNvPr id="132" name="Rectangle 131"/>
           <p:cNvSpPr/>
           <p:nvPr/>
         </p:nvSpPr>
@@ -8360,7 +9008,7 @@
       </p:sp>
       <p:cxnSp>
         <p:nvCxnSpPr>
-          <p:cNvPr id="117" name="Connector 116"/>
+          <p:cNvPr id="133" name="Connector 132"/>
           <p:cNvCxnSpPr/>
           <p:nvPr/>
         </p:nvCxnSpPr>
@@ -8395,7 +9043,7 @@
       </p:cxnSp>
       <p:sp>
         <p:nvSpPr>
-          <p:cNvPr id="118" name="Rectangle 117"/>
+          <p:cNvPr id="134" name="Rectangle 133"/>
           <p:cNvSpPr/>
           <p:nvPr/>
         </p:nvSpPr>
@@ -8449,7 +9097,7 @@
       </p:sp>
       <p:sp>
         <p:nvSpPr>
-          <p:cNvPr id="119" name="Diamond 118"/>
+          <p:cNvPr id="135" name="Diamond 134"/>
           <p:cNvSpPr/>
           <p:nvPr/>
         </p:nvSpPr>
@@ -8495,7 +9143,7 @@
       </p:sp>
       <p:sp>
         <p:nvSpPr>
-          <p:cNvPr id="120" name="Rectangle 119"/>
+          <p:cNvPr id="136" name="Rectangle 135"/>
           <p:cNvSpPr/>
           <p:nvPr/>
         </p:nvSpPr>
@@ -8545,7 +9193,7 @@
       </p:sp>
       <p:sp>
         <p:nvSpPr>
-          <p:cNvPr id="121" name="Diamond 120"/>
+          <p:cNvPr id="137" name="Diamond 136"/>
           <p:cNvSpPr/>
           <p:nvPr/>
         </p:nvSpPr>
@@ -8591,7 +9239,7 @@
       </p:sp>
       <p:sp>
         <p:nvSpPr>
-          <p:cNvPr id="122" name="Rectangle 121"/>
+          <p:cNvPr id="138" name="Rectangle 137"/>
           <p:cNvSpPr/>
           <p:nvPr/>
         </p:nvSpPr>
@@ -8641,7 +9289,7 @@
       </p:sp>
       <p:sp>
         <p:nvSpPr>
-          <p:cNvPr id="123" name="Rounded Rectangle 122"/>
+          <p:cNvPr id="139" name="Rounded Rectangle 138"/>
           <p:cNvSpPr/>
           <p:nvPr/>
         </p:nvSpPr>
@@ -8687,7 +9335,7 @@
       </p:sp>
       <p:sp>
         <p:nvSpPr>
-          <p:cNvPr id="124" name="Rectangle 123"/>
+          <p:cNvPr id="140" name="Rectangle 139"/>
           <p:cNvSpPr/>
           <p:nvPr/>
         </p:nvSpPr>
@@ -8737,7 +9385,7 @@
       </p:sp>
       <p:sp>
         <p:nvSpPr>
-          <p:cNvPr id="125" name="Rounded Rectangle 124"/>
+          <p:cNvPr id="141" name="Rounded Rectangle 140"/>
           <p:cNvSpPr/>
           <p:nvPr/>
         </p:nvSpPr>
@@ -8783,7 +9431,7 @@
       </p:sp>
       <p:sp>
         <p:nvSpPr>
-          <p:cNvPr id="126" name="Rectangle 125"/>
+          <p:cNvPr id="142" name="Rectangle 141"/>
           <p:cNvSpPr/>
           <p:nvPr/>
         </p:nvSpPr>
@@ -8833,7 +9481,7 @@
       </p:sp>
       <p:sp>
         <p:nvSpPr>
-          <p:cNvPr id="127" name="Rounded Rectangle 126"/>
+          <p:cNvPr id="143" name="Rounded Rectangle 142"/>
           <p:cNvSpPr/>
           <p:nvPr/>
         </p:nvSpPr>
@@ -8879,7 +9527,7 @@
       </p:sp>
       <p:sp>
         <p:nvSpPr>
-          <p:cNvPr id="128" name="Rectangle 127"/>
+          <p:cNvPr id="144" name="Rectangle 143"/>
           <p:cNvSpPr/>
           <p:nvPr/>
         </p:nvSpPr>
@@ -8929,7 +9577,7 @@
       </p:sp>
       <p:sp>
         <p:nvSpPr>
-          <p:cNvPr id="129" name="Rounded Rectangle 128"/>
+          <p:cNvPr id="145" name="Rounded Rectangle 144"/>
           <p:cNvSpPr/>
           <p:nvPr/>
         </p:nvSpPr>
@@ -8975,7 +9623,7 @@
       </p:sp>
       <p:sp>
         <p:nvSpPr>
-          <p:cNvPr id="130" name="Rectangle 129"/>
+          <p:cNvPr id="146" name="Rectangle 145"/>
           <p:cNvSpPr/>
           <p:nvPr/>
         </p:nvSpPr>
@@ -9025,7 +9673,7 @@
       </p:sp>
       <p:sp>
         <p:nvSpPr>
-          <p:cNvPr id="131" name="Rounded Rectangle 130"/>
+          <p:cNvPr id="147" name="Rounded Rectangle 146"/>
           <p:cNvSpPr/>
           <p:nvPr/>
         </p:nvSpPr>
@@ -9071,7 +9719,7 @@
       </p:sp>
       <p:sp>
         <p:nvSpPr>
-          <p:cNvPr id="132" name="Rectangle 131"/>
+          <p:cNvPr id="148" name="Rectangle 147"/>
           <p:cNvSpPr/>
           <p:nvPr/>
         </p:nvSpPr>
@@ -9121,7 +9769,7 @@
       </p:sp>
       <p:sp>
         <p:nvSpPr>
-          <p:cNvPr id="133" name="Pentagon 132"/>
+          <p:cNvPr id="149" name="Pentagon 148"/>
           <p:cNvSpPr/>
           <p:nvPr/>
         </p:nvSpPr>
@@ -9167,7 +9815,7 @@
       </p:sp>
       <p:sp>
         <p:nvSpPr>
-          <p:cNvPr id="134" name="Rectangle 133"/>
+          <p:cNvPr id="150" name="Rectangle 149"/>
           <p:cNvSpPr/>
           <p:nvPr/>
         </p:nvSpPr>
@@ -9217,7 +9865,7 @@
       </p:sp>
       <p:sp>
         <p:nvSpPr>
-          <p:cNvPr id="135" name="Pentagon 134"/>
+          <p:cNvPr id="151" name="Pentagon 150"/>
           <p:cNvSpPr/>
           <p:nvPr/>
         </p:nvSpPr>
@@ -9263,7 +9911,7 @@
       </p:sp>
       <p:sp>
         <p:nvSpPr>
-          <p:cNvPr id="136" name="Rectangle 135"/>
+          <p:cNvPr id="152" name="Rectangle 151"/>
           <p:cNvSpPr/>
           <p:nvPr/>
         </p:nvSpPr>

--- a/roadmap.pptx
+++ b/roadmap.pptx
@@ -8234,59 +8234,24 @@
           </a:p>
         </p:txBody>
       </p:sp>
-      <p:cxnSp>
-        <p:nvCxnSpPr>
-          <p:cNvPr id="114" name="Connector 113"/>
-          <p:cNvCxnSpPr/>
-          <p:nvPr/>
-        </p:nvCxnSpPr>
-        <p:spPr>
-          <a:xfrm>
-            <a:off x="3886200" y="1161288"/>
-            <a:ext cx="0" cy="932688"/>
-          </a:xfrm>
-          <a:prstGeom prst="line">
-            <a:avLst/>
-          </a:prstGeom>
-          <a:ln w="19050">
-            <a:solidFill>
-              <a:srgbClr val="2F5597"/>
-            </a:solidFill>
-          </a:ln>
-        </p:spPr>
-        <p:style>
-          <a:lnRef idx="2">
-            <a:schemeClr val="accent1"/>
-          </a:lnRef>
-          <a:fillRef idx="0">
-            <a:schemeClr val="accent1"/>
-          </a:fillRef>
-          <a:effectRef idx="1">
-            <a:schemeClr val="accent1"/>
-          </a:effectRef>
-          <a:fontRef idx="minor">
-            <a:schemeClr val="tx1"/>
-          </a:fontRef>
-        </p:style>
-      </p:cxnSp>
-      <p:sp>
-        <p:nvSpPr>
-          <p:cNvPr id="115" name="Pentagon 114"/>
+      <p:sp>
+        <p:nvSpPr>
+          <p:cNvPr id="114" name="Diamond 113"/>
           <p:cNvSpPr/>
           <p:nvPr/>
         </p:nvSpPr>
         <p:spPr>
           <a:xfrm>
-            <a:off x="3886200" y="1161288"/>
-            <a:ext cx="146304" cy="137160"/>
-          </a:xfrm>
-          <a:prstGeom prst="homePlate">
+            <a:off x="3813048" y="1243584"/>
+            <a:ext cx="146304" cy="146304"/>
+          </a:xfrm>
+          <a:prstGeom prst="diamond">
             <a:avLst/>
           </a:prstGeom>
           <a:solidFill>
             <a:srgbClr val="4472C4"/>
           </a:solidFill>
-          <a:ln w="12700">
+          <a:ln w="15875">
             <a:solidFill>
               <a:srgbClr val="2F5597"/>
             </a:solidFill>
@@ -8315,59 +8280,24 @@
           </a:p>
         </p:txBody>
       </p:sp>
-      <p:cxnSp>
-        <p:nvCxnSpPr>
-          <p:cNvPr id="116" name="Connector 115"/>
-          <p:cNvCxnSpPr/>
-          <p:nvPr/>
-        </p:nvCxnSpPr>
-        <p:spPr>
-          <a:xfrm>
-            <a:off x="7506869" y="1161288"/>
-            <a:ext cx="0" cy="932688"/>
-          </a:xfrm>
-          <a:prstGeom prst="line">
-            <a:avLst/>
-          </a:prstGeom>
-          <a:ln w="19050">
-            <a:solidFill>
-              <a:srgbClr val="7F0000"/>
-            </a:solidFill>
-          </a:ln>
-        </p:spPr>
-        <p:style>
-          <a:lnRef idx="2">
-            <a:schemeClr val="accent1"/>
-          </a:lnRef>
-          <a:fillRef idx="0">
-            <a:schemeClr val="accent1"/>
-          </a:fillRef>
-          <a:effectRef idx="1">
-            <a:schemeClr val="accent1"/>
-          </a:effectRef>
-          <a:fontRef idx="minor">
-            <a:schemeClr val="tx1"/>
-          </a:fontRef>
-        </p:style>
-      </p:cxnSp>
-      <p:sp>
-        <p:nvSpPr>
-          <p:cNvPr id="117" name="Pentagon 116"/>
+      <p:sp>
+        <p:nvSpPr>
+          <p:cNvPr id="115" name="Diamond 114"/>
           <p:cNvSpPr/>
           <p:nvPr/>
         </p:nvSpPr>
         <p:spPr>
-          <a:xfrm rot="10800000">
-            <a:off x="7360565" y="1161288"/>
-            <a:ext cx="146304" cy="137160"/>
-          </a:xfrm>
-          <a:prstGeom prst="homePlate">
+          <a:xfrm>
+            <a:off x="7433717" y="1243584"/>
+            <a:ext cx="146304" cy="146304"/>
+          </a:xfrm>
+          <a:prstGeom prst="diamond">
             <a:avLst/>
           </a:prstGeom>
           <a:solidFill>
             <a:srgbClr val="C00000"/>
           </a:solidFill>
-          <a:ln w="12700">
+          <a:ln w="15875">
             <a:solidFill>
               <a:srgbClr val="7F0000"/>
             </a:solidFill>
@@ -8396,59 +8326,24 @@
           </a:p>
         </p:txBody>
       </p:sp>
-      <p:cxnSp>
-        <p:nvCxnSpPr>
-          <p:cNvPr id="118" name="Connector 117"/>
-          <p:cNvCxnSpPr/>
-          <p:nvPr/>
-        </p:nvCxnSpPr>
-        <p:spPr>
-          <a:xfrm>
-            <a:off x="6671330" y="2093976"/>
-            <a:ext cx="0" cy="932688"/>
-          </a:xfrm>
-          <a:prstGeom prst="line">
-            <a:avLst/>
-          </a:prstGeom>
-          <a:ln w="19050">
-            <a:solidFill>
-              <a:srgbClr val="2F5597"/>
-            </a:solidFill>
-          </a:ln>
-        </p:spPr>
-        <p:style>
-          <a:lnRef idx="2">
-            <a:schemeClr val="accent1"/>
-          </a:lnRef>
-          <a:fillRef idx="0">
-            <a:schemeClr val="accent1"/>
-          </a:fillRef>
-          <a:effectRef idx="1">
-            <a:schemeClr val="accent1"/>
-          </a:effectRef>
-          <a:fontRef idx="minor">
-            <a:schemeClr val="tx1"/>
-          </a:fontRef>
-        </p:style>
-      </p:cxnSp>
-      <p:sp>
-        <p:nvSpPr>
-          <p:cNvPr id="119" name="Pentagon 118"/>
+      <p:sp>
+        <p:nvSpPr>
+          <p:cNvPr id="116" name="Diamond 115"/>
           <p:cNvSpPr/>
           <p:nvPr/>
         </p:nvSpPr>
         <p:spPr>
           <a:xfrm>
-            <a:off x="6671330" y="2093976"/>
-            <a:ext cx="146304" cy="137160"/>
-          </a:xfrm>
-          <a:prstGeom prst="homePlate">
+            <a:off x="6598178" y="2176272"/>
+            <a:ext cx="146304" cy="146304"/>
+          </a:xfrm>
+          <a:prstGeom prst="diamond">
             <a:avLst/>
           </a:prstGeom>
           <a:solidFill>
             <a:srgbClr val="4472C4"/>
           </a:solidFill>
-          <a:ln w="12700">
+          <a:ln w="15875">
             <a:solidFill>
               <a:srgbClr val="2F5597"/>
             </a:solidFill>
@@ -8477,59 +8372,208 @@
           </a:p>
         </p:txBody>
       </p:sp>
-      <p:cxnSp>
-        <p:nvCxnSpPr>
-          <p:cNvPr id="120" name="Connector 119"/>
-          <p:cNvCxnSpPr/>
-          <p:nvPr/>
-        </p:nvCxnSpPr>
-        <p:spPr>
-          <a:xfrm>
-            <a:off x="8620921" y="2093976"/>
-            <a:ext cx="0" cy="932688"/>
-          </a:xfrm>
-          <a:prstGeom prst="line">
-            <a:avLst/>
-          </a:prstGeom>
-          <a:ln w="19050">
-            <a:solidFill>
-              <a:srgbClr val="7F0000"/>
-            </a:solidFill>
-          </a:ln>
-        </p:spPr>
-        <p:style>
-          <a:lnRef idx="2">
-            <a:schemeClr val="accent1"/>
-          </a:lnRef>
-          <a:fillRef idx="0">
-            <a:schemeClr val="accent1"/>
-          </a:fillRef>
-          <a:effectRef idx="1">
-            <a:schemeClr val="accent1"/>
-          </a:effectRef>
-          <a:fontRef idx="minor">
-            <a:schemeClr val="tx1"/>
-          </a:fontRef>
-        </p:style>
-      </p:cxnSp>
-      <p:sp>
-        <p:nvSpPr>
-          <p:cNvPr id="121" name="Pentagon 120"/>
+      <p:sp>
+        <p:nvSpPr>
+          <p:cNvPr id="117" name="Diamond 116"/>
           <p:cNvSpPr/>
           <p:nvPr/>
         </p:nvSpPr>
         <p:spPr>
-          <a:xfrm rot="10800000">
-            <a:off x="8474617" y="2093976"/>
-            <a:ext cx="146304" cy="137160"/>
-          </a:xfrm>
-          <a:prstGeom prst="homePlate">
+          <a:xfrm>
+            <a:off x="8547769" y="2176272"/>
+            <a:ext cx="146304" cy="146304"/>
+          </a:xfrm>
+          <a:prstGeom prst="diamond">
             <a:avLst/>
           </a:prstGeom>
           <a:solidFill>
             <a:srgbClr val="C00000"/>
           </a:solidFill>
-          <a:ln w="12700">
+          <a:ln w="15875">
+            <a:solidFill>
+              <a:srgbClr val="7F0000"/>
+            </a:solidFill>
+          </a:ln>
+          <a:effectLst/>
+        </p:spPr>
+        <p:style>
+          <a:lnRef idx="1">
+            <a:schemeClr val="accent1"/>
+          </a:lnRef>
+          <a:fillRef idx="3">
+            <a:schemeClr val="accent1"/>
+          </a:fillRef>
+          <a:effectRef idx="2">
+            <a:schemeClr val="accent1"/>
+          </a:effectRef>
+          <a:fontRef idx="minor">
+            <a:schemeClr val="lt1"/>
+          </a:fontRef>
+        </p:style>
+        <p:txBody>
+          <a:bodyPr rtlCol="0" anchor="ctr" wrap="square" lIns="18000" rIns="18000" tIns="9000" bIns="9000"/>
+          <a:lstStyle/>
+          <a:p>
+            <a:pPr algn="ctr"/>
+          </a:p>
+        </p:txBody>
+      </p:sp>
+      <p:sp>
+        <p:nvSpPr>
+          <p:cNvPr id="118" name="Diamond 117"/>
+          <p:cNvSpPr/>
+          <p:nvPr/>
+        </p:nvSpPr>
+        <p:spPr>
+          <a:xfrm>
+            <a:off x="7155204" y="3108960"/>
+            <a:ext cx="146304" cy="146304"/>
+          </a:xfrm>
+          <a:prstGeom prst="diamond">
+            <a:avLst/>
+          </a:prstGeom>
+          <a:solidFill>
+            <a:srgbClr val="4472C4"/>
+          </a:solidFill>
+          <a:ln w="15875">
+            <a:solidFill>
+              <a:srgbClr val="2F5597"/>
+            </a:solidFill>
+          </a:ln>
+          <a:effectLst/>
+        </p:spPr>
+        <p:style>
+          <a:lnRef idx="1">
+            <a:schemeClr val="accent1"/>
+          </a:lnRef>
+          <a:fillRef idx="3">
+            <a:schemeClr val="accent1"/>
+          </a:fillRef>
+          <a:effectRef idx="2">
+            <a:schemeClr val="accent1"/>
+          </a:effectRef>
+          <a:fontRef idx="minor">
+            <a:schemeClr val="lt1"/>
+          </a:fontRef>
+        </p:style>
+        <p:txBody>
+          <a:bodyPr rtlCol="0" anchor="ctr" wrap="square" lIns="18000" rIns="18000" tIns="9000" bIns="9000"/>
+          <a:lstStyle/>
+          <a:p>
+            <a:pPr algn="ctr"/>
+          </a:p>
+        </p:txBody>
+      </p:sp>
+      <p:sp>
+        <p:nvSpPr>
+          <p:cNvPr id="119" name="Diamond 118"/>
+          <p:cNvSpPr/>
+          <p:nvPr/>
+        </p:nvSpPr>
+        <p:spPr>
+          <a:xfrm>
+            <a:off x="10775873" y="3108960"/>
+            <a:ext cx="146304" cy="146304"/>
+          </a:xfrm>
+          <a:prstGeom prst="diamond">
+            <a:avLst/>
+          </a:prstGeom>
+          <a:solidFill>
+            <a:srgbClr val="C00000"/>
+          </a:solidFill>
+          <a:ln w="15875">
+            <a:solidFill>
+              <a:srgbClr val="7F0000"/>
+            </a:solidFill>
+          </a:ln>
+          <a:effectLst/>
+        </p:spPr>
+        <p:style>
+          <a:lnRef idx="1">
+            <a:schemeClr val="accent1"/>
+          </a:lnRef>
+          <a:fillRef idx="3">
+            <a:schemeClr val="accent1"/>
+          </a:fillRef>
+          <a:effectRef idx="2">
+            <a:schemeClr val="accent1"/>
+          </a:effectRef>
+          <a:fontRef idx="minor">
+            <a:schemeClr val="lt1"/>
+          </a:fontRef>
+        </p:style>
+        <p:txBody>
+          <a:bodyPr rtlCol="0" anchor="ctr" wrap="square" lIns="18000" rIns="18000" tIns="9000" bIns="9000"/>
+          <a:lstStyle/>
+          <a:p>
+            <a:pPr algn="ctr"/>
+          </a:p>
+        </p:txBody>
+      </p:sp>
+      <p:sp>
+        <p:nvSpPr>
+          <p:cNvPr id="120" name="Diamond 119"/>
+          <p:cNvSpPr/>
+          <p:nvPr/>
+        </p:nvSpPr>
+        <p:spPr>
+          <a:xfrm>
+            <a:off x="9940334" y="4041648"/>
+            <a:ext cx="146304" cy="146304"/>
+          </a:xfrm>
+          <a:prstGeom prst="diamond">
+            <a:avLst/>
+          </a:prstGeom>
+          <a:solidFill>
+            <a:srgbClr val="4472C4"/>
+          </a:solidFill>
+          <a:ln w="15875">
+            <a:solidFill>
+              <a:srgbClr val="2F5597"/>
+            </a:solidFill>
+          </a:ln>
+          <a:effectLst/>
+        </p:spPr>
+        <p:style>
+          <a:lnRef idx="1">
+            <a:schemeClr val="accent1"/>
+          </a:lnRef>
+          <a:fillRef idx="3">
+            <a:schemeClr val="accent1"/>
+          </a:fillRef>
+          <a:effectRef idx="2">
+            <a:schemeClr val="accent1"/>
+          </a:effectRef>
+          <a:fontRef idx="minor">
+            <a:schemeClr val="lt1"/>
+          </a:fontRef>
+        </p:style>
+        <p:txBody>
+          <a:bodyPr rtlCol="0" anchor="ctr" wrap="square" lIns="18000" rIns="18000" tIns="9000" bIns="9000"/>
+          <a:lstStyle/>
+          <a:p>
+            <a:pPr algn="ctr"/>
+          </a:p>
+        </p:txBody>
+      </p:sp>
+      <p:sp>
+        <p:nvSpPr>
+          <p:cNvPr id="121" name="Diamond 120"/>
+          <p:cNvSpPr/>
+          <p:nvPr/>
+        </p:nvSpPr>
+        <p:spPr>
+          <a:xfrm>
+            <a:off x="11889925" y="4041648"/>
+            <a:ext cx="146304" cy="146304"/>
+          </a:xfrm>
+          <a:prstGeom prst="diamond">
+            <a:avLst/>
+          </a:prstGeom>
+          <a:solidFill>
+            <a:srgbClr val="C00000"/>
+          </a:solidFill>
+          <a:ln w="15875">
             <a:solidFill>
               <a:srgbClr val="7F0000"/>
             </a:solidFill>
@@ -8566,330 +8610,6 @@
         </p:nvCxnSpPr>
         <p:spPr>
           <a:xfrm>
-            <a:off x="7228356" y="3026664"/>
-            <a:ext cx="0" cy="932688"/>
-          </a:xfrm>
-          <a:prstGeom prst="line">
-            <a:avLst/>
-          </a:prstGeom>
-          <a:ln w="19050">
-            <a:solidFill>
-              <a:srgbClr val="2F5597"/>
-            </a:solidFill>
-          </a:ln>
-        </p:spPr>
-        <p:style>
-          <a:lnRef idx="2">
-            <a:schemeClr val="accent1"/>
-          </a:lnRef>
-          <a:fillRef idx="0">
-            <a:schemeClr val="accent1"/>
-          </a:fillRef>
-          <a:effectRef idx="1">
-            <a:schemeClr val="accent1"/>
-          </a:effectRef>
-          <a:fontRef idx="minor">
-            <a:schemeClr val="tx1"/>
-          </a:fontRef>
-        </p:style>
-      </p:cxnSp>
-      <p:sp>
-        <p:nvSpPr>
-          <p:cNvPr id="123" name="Pentagon 122"/>
-          <p:cNvSpPr/>
-          <p:nvPr/>
-        </p:nvSpPr>
-        <p:spPr>
-          <a:xfrm>
-            <a:off x="7228356" y="3026664"/>
-            <a:ext cx="146304" cy="137160"/>
-          </a:xfrm>
-          <a:prstGeom prst="homePlate">
-            <a:avLst/>
-          </a:prstGeom>
-          <a:solidFill>
-            <a:srgbClr val="4472C4"/>
-          </a:solidFill>
-          <a:ln w="12700">
-            <a:solidFill>
-              <a:srgbClr val="2F5597"/>
-            </a:solidFill>
-          </a:ln>
-          <a:effectLst/>
-        </p:spPr>
-        <p:style>
-          <a:lnRef idx="1">
-            <a:schemeClr val="accent1"/>
-          </a:lnRef>
-          <a:fillRef idx="3">
-            <a:schemeClr val="accent1"/>
-          </a:fillRef>
-          <a:effectRef idx="2">
-            <a:schemeClr val="accent1"/>
-          </a:effectRef>
-          <a:fontRef idx="minor">
-            <a:schemeClr val="lt1"/>
-          </a:fontRef>
-        </p:style>
-        <p:txBody>
-          <a:bodyPr rtlCol="0" anchor="ctr" wrap="square" lIns="18000" rIns="18000" tIns="9000" bIns="9000"/>
-          <a:lstStyle/>
-          <a:p>
-            <a:pPr algn="ctr"/>
-          </a:p>
-        </p:txBody>
-      </p:sp>
-      <p:cxnSp>
-        <p:nvCxnSpPr>
-          <p:cNvPr id="124" name="Connector 123"/>
-          <p:cNvCxnSpPr/>
-          <p:nvPr/>
-        </p:nvCxnSpPr>
-        <p:spPr>
-          <a:xfrm>
-            <a:off x="10849025" y="3026664"/>
-            <a:ext cx="0" cy="932688"/>
-          </a:xfrm>
-          <a:prstGeom prst="line">
-            <a:avLst/>
-          </a:prstGeom>
-          <a:ln w="19050">
-            <a:solidFill>
-              <a:srgbClr val="7F0000"/>
-            </a:solidFill>
-          </a:ln>
-        </p:spPr>
-        <p:style>
-          <a:lnRef idx="2">
-            <a:schemeClr val="accent1"/>
-          </a:lnRef>
-          <a:fillRef idx="0">
-            <a:schemeClr val="accent1"/>
-          </a:fillRef>
-          <a:effectRef idx="1">
-            <a:schemeClr val="accent1"/>
-          </a:effectRef>
-          <a:fontRef idx="minor">
-            <a:schemeClr val="tx1"/>
-          </a:fontRef>
-        </p:style>
-      </p:cxnSp>
-      <p:sp>
-        <p:nvSpPr>
-          <p:cNvPr id="125" name="Pentagon 124"/>
-          <p:cNvSpPr/>
-          <p:nvPr/>
-        </p:nvSpPr>
-        <p:spPr>
-          <a:xfrm rot="10800000">
-            <a:off x="10702721" y="3026664"/>
-            <a:ext cx="146304" cy="137160"/>
-          </a:xfrm>
-          <a:prstGeom prst="homePlate">
-            <a:avLst/>
-          </a:prstGeom>
-          <a:solidFill>
-            <a:srgbClr val="C00000"/>
-          </a:solidFill>
-          <a:ln w="12700">
-            <a:solidFill>
-              <a:srgbClr val="7F0000"/>
-            </a:solidFill>
-          </a:ln>
-          <a:effectLst/>
-        </p:spPr>
-        <p:style>
-          <a:lnRef idx="1">
-            <a:schemeClr val="accent1"/>
-          </a:lnRef>
-          <a:fillRef idx="3">
-            <a:schemeClr val="accent1"/>
-          </a:fillRef>
-          <a:effectRef idx="2">
-            <a:schemeClr val="accent1"/>
-          </a:effectRef>
-          <a:fontRef idx="minor">
-            <a:schemeClr val="lt1"/>
-          </a:fontRef>
-        </p:style>
-        <p:txBody>
-          <a:bodyPr rtlCol="0" anchor="ctr" wrap="square" lIns="18000" rIns="18000" tIns="9000" bIns="9000"/>
-          <a:lstStyle/>
-          <a:p>
-            <a:pPr algn="ctr"/>
-          </a:p>
-        </p:txBody>
-      </p:sp>
-      <p:cxnSp>
-        <p:nvCxnSpPr>
-          <p:cNvPr id="126" name="Connector 125"/>
-          <p:cNvCxnSpPr/>
-          <p:nvPr/>
-        </p:nvCxnSpPr>
-        <p:spPr>
-          <a:xfrm>
-            <a:off x="10013486" y="3959352"/>
-            <a:ext cx="0" cy="932688"/>
-          </a:xfrm>
-          <a:prstGeom prst="line">
-            <a:avLst/>
-          </a:prstGeom>
-          <a:ln w="19050">
-            <a:solidFill>
-              <a:srgbClr val="2F5597"/>
-            </a:solidFill>
-          </a:ln>
-        </p:spPr>
-        <p:style>
-          <a:lnRef idx="2">
-            <a:schemeClr val="accent1"/>
-          </a:lnRef>
-          <a:fillRef idx="0">
-            <a:schemeClr val="accent1"/>
-          </a:fillRef>
-          <a:effectRef idx="1">
-            <a:schemeClr val="accent1"/>
-          </a:effectRef>
-          <a:fontRef idx="minor">
-            <a:schemeClr val="tx1"/>
-          </a:fontRef>
-        </p:style>
-      </p:cxnSp>
-      <p:sp>
-        <p:nvSpPr>
-          <p:cNvPr id="127" name="Pentagon 126"/>
-          <p:cNvSpPr/>
-          <p:nvPr/>
-        </p:nvSpPr>
-        <p:spPr>
-          <a:xfrm>
-            <a:off x="10013486" y="3959352"/>
-            <a:ext cx="146304" cy="137160"/>
-          </a:xfrm>
-          <a:prstGeom prst="homePlate">
-            <a:avLst/>
-          </a:prstGeom>
-          <a:solidFill>
-            <a:srgbClr val="4472C4"/>
-          </a:solidFill>
-          <a:ln w="12700">
-            <a:solidFill>
-              <a:srgbClr val="2F5597"/>
-            </a:solidFill>
-          </a:ln>
-          <a:effectLst/>
-        </p:spPr>
-        <p:style>
-          <a:lnRef idx="1">
-            <a:schemeClr val="accent1"/>
-          </a:lnRef>
-          <a:fillRef idx="3">
-            <a:schemeClr val="accent1"/>
-          </a:fillRef>
-          <a:effectRef idx="2">
-            <a:schemeClr val="accent1"/>
-          </a:effectRef>
-          <a:fontRef idx="minor">
-            <a:schemeClr val="lt1"/>
-          </a:fontRef>
-        </p:style>
-        <p:txBody>
-          <a:bodyPr rtlCol="0" anchor="ctr" wrap="square" lIns="18000" rIns="18000" tIns="9000" bIns="9000"/>
-          <a:lstStyle/>
-          <a:p>
-            <a:pPr algn="ctr"/>
-          </a:p>
-        </p:txBody>
-      </p:sp>
-      <p:cxnSp>
-        <p:nvCxnSpPr>
-          <p:cNvPr id="128" name="Connector 127"/>
-          <p:cNvCxnSpPr/>
-          <p:nvPr/>
-        </p:nvCxnSpPr>
-        <p:spPr>
-          <a:xfrm>
-            <a:off x="11963077" y="3959352"/>
-            <a:ext cx="0" cy="932688"/>
-          </a:xfrm>
-          <a:prstGeom prst="line">
-            <a:avLst/>
-          </a:prstGeom>
-          <a:ln w="19050">
-            <a:solidFill>
-              <a:srgbClr val="7F0000"/>
-            </a:solidFill>
-          </a:ln>
-        </p:spPr>
-        <p:style>
-          <a:lnRef idx="2">
-            <a:schemeClr val="accent1"/>
-          </a:lnRef>
-          <a:fillRef idx="0">
-            <a:schemeClr val="accent1"/>
-          </a:fillRef>
-          <a:effectRef idx="1">
-            <a:schemeClr val="accent1"/>
-          </a:effectRef>
-          <a:fontRef idx="minor">
-            <a:schemeClr val="tx1"/>
-          </a:fontRef>
-        </p:style>
-      </p:cxnSp>
-      <p:sp>
-        <p:nvSpPr>
-          <p:cNvPr id="129" name="Pentagon 128"/>
-          <p:cNvSpPr/>
-          <p:nvPr/>
-        </p:nvSpPr>
-        <p:spPr>
-          <a:xfrm rot="10800000">
-            <a:off x="11816773" y="3959352"/>
-            <a:ext cx="146304" cy="137160"/>
-          </a:xfrm>
-          <a:prstGeom prst="homePlate">
-            <a:avLst/>
-          </a:prstGeom>
-          <a:solidFill>
-            <a:srgbClr val="C00000"/>
-          </a:solidFill>
-          <a:ln w="12700">
-            <a:solidFill>
-              <a:srgbClr val="7F0000"/>
-            </a:solidFill>
-          </a:ln>
-          <a:effectLst/>
-        </p:spPr>
-        <p:style>
-          <a:lnRef idx="1">
-            <a:schemeClr val="accent1"/>
-          </a:lnRef>
-          <a:fillRef idx="3">
-            <a:schemeClr val="accent1"/>
-          </a:fillRef>
-          <a:effectRef idx="2">
-            <a:schemeClr val="accent1"/>
-          </a:effectRef>
-          <a:fontRef idx="minor">
-            <a:schemeClr val="lt1"/>
-          </a:fontRef>
-        </p:style>
-        <p:txBody>
-          <a:bodyPr rtlCol="0" anchor="ctr" wrap="square" lIns="18000" rIns="18000" tIns="9000" bIns="9000"/>
-          <a:lstStyle/>
-          <a:p>
-            <a:pPr algn="ctr"/>
-          </a:p>
-        </p:txBody>
-      </p:sp>
-      <p:cxnSp>
-        <p:nvCxnSpPr>
-          <p:cNvPr id="130" name="Connector 129"/>
-          <p:cNvCxnSpPr/>
-          <p:nvPr/>
-        </p:nvCxnSpPr>
-        <p:spPr>
-          <a:xfrm>
             <a:off x="4025456" y="1161288"/>
             <a:ext cx="0" cy="3730752"/>
           </a:xfrm>
@@ -8919,7 +8639,7 @@
       </p:cxnSp>
       <p:cxnSp>
         <p:nvCxnSpPr>
-          <p:cNvPr id="131" name="Connector 130"/>
+          <p:cNvPr id="123" name="Connector 122"/>
           <p:cNvCxnSpPr/>
           <p:nvPr/>
         </p:nvCxnSpPr>
@@ -8954,7 +8674,7 @@
       </p:cxnSp>
       <p:sp>
         <p:nvSpPr>
-          <p:cNvPr id="132" name="Rectangle 131"/>
+          <p:cNvPr id="124" name="Rectangle 123"/>
           <p:cNvSpPr/>
           <p:nvPr/>
         </p:nvSpPr>
@@ -9008,7 +8728,7 @@
       </p:sp>
       <p:cxnSp>
         <p:nvCxnSpPr>
-          <p:cNvPr id="133" name="Connector 132"/>
+          <p:cNvPr id="125" name="Connector 124"/>
           <p:cNvCxnSpPr/>
           <p:nvPr/>
         </p:nvCxnSpPr>
@@ -9043,7 +8763,7 @@
       </p:cxnSp>
       <p:sp>
         <p:nvSpPr>
-          <p:cNvPr id="134" name="Rectangle 133"/>
+          <p:cNvPr id="126" name="Rectangle 125"/>
           <p:cNvSpPr/>
           <p:nvPr/>
         </p:nvSpPr>
@@ -9097,7 +8817,7 @@
       </p:sp>
       <p:sp>
         <p:nvSpPr>
-          <p:cNvPr id="135" name="Diamond 134"/>
+          <p:cNvPr id="127" name="Diamond 126"/>
           <p:cNvSpPr/>
           <p:nvPr/>
         </p:nvSpPr>
@@ -9143,7 +8863,7 @@
       </p:sp>
       <p:sp>
         <p:nvSpPr>
-          <p:cNvPr id="136" name="Rectangle 135"/>
+          <p:cNvPr id="128" name="Rectangle 127"/>
           <p:cNvSpPr/>
           <p:nvPr/>
         </p:nvSpPr>
@@ -9193,7 +8913,7 @@
       </p:sp>
       <p:sp>
         <p:nvSpPr>
-          <p:cNvPr id="137" name="Diamond 136"/>
+          <p:cNvPr id="129" name="Diamond 128"/>
           <p:cNvSpPr/>
           <p:nvPr/>
         </p:nvSpPr>
@@ -9239,7 +8959,7 @@
       </p:sp>
       <p:sp>
         <p:nvSpPr>
-          <p:cNvPr id="138" name="Rectangle 137"/>
+          <p:cNvPr id="130" name="Rectangle 129"/>
           <p:cNvSpPr/>
           <p:nvPr/>
         </p:nvSpPr>
@@ -9289,7 +9009,7 @@
       </p:sp>
       <p:sp>
         <p:nvSpPr>
-          <p:cNvPr id="139" name="Rounded Rectangle 138"/>
+          <p:cNvPr id="131" name="Rounded Rectangle 130"/>
           <p:cNvSpPr/>
           <p:nvPr/>
         </p:nvSpPr>
@@ -9335,7 +9055,7 @@
       </p:sp>
       <p:sp>
         <p:nvSpPr>
-          <p:cNvPr id="140" name="Rectangle 139"/>
+          <p:cNvPr id="132" name="Rectangle 131"/>
           <p:cNvSpPr/>
           <p:nvPr/>
         </p:nvSpPr>
@@ -9385,7 +9105,7 @@
       </p:sp>
       <p:sp>
         <p:nvSpPr>
-          <p:cNvPr id="141" name="Rounded Rectangle 140"/>
+          <p:cNvPr id="133" name="Rounded Rectangle 132"/>
           <p:cNvSpPr/>
           <p:nvPr/>
         </p:nvSpPr>
@@ -9431,7 +9151,7 @@
       </p:sp>
       <p:sp>
         <p:nvSpPr>
-          <p:cNvPr id="142" name="Rectangle 141"/>
+          <p:cNvPr id="134" name="Rectangle 133"/>
           <p:cNvSpPr/>
           <p:nvPr/>
         </p:nvSpPr>
@@ -9481,7 +9201,7 @@
       </p:sp>
       <p:sp>
         <p:nvSpPr>
-          <p:cNvPr id="143" name="Rounded Rectangle 142"/>
+          <p:cNvPr id="135" name="Rounded Rectangle 134"/>
           <p:cNvSpPr/>
           <p:nvPr/>
         </p:nvSpPr>
@@ -9527,7 +9247,7 @@
       </p:sp>
       <p:sp>
         <p:nvSpPr>
-          <p:cNvPr id="144" name="Rectangle 143"/>
+          <p:cNvPr id="136" name="Rectangle 135"/>
           <p:cNvSpPr/>
           <p:nvPr/>
         </p:nvSpPr>
@@ -9577,7 +9297,7 @@
       </p:sp>
       <p:sp>
         <p:nvSpPr>
-          <p:cNvPr id="145" name="Rounded Rectangle 144"/>
+          <p:cNvPr id="137" name="Rounded Rectangle 136"/>
           <p:cNvSpPr/>
           <p:nvPr/>
         </p:nvSpPr>
@@ -9623,7 +9343,7 @@
       </p:sp>
       <p:sp>
         <p:nvSpPr>
-          <p:cNvPr id="146" name="Rectangle 145"/>
+          <p:cNvPr id="138" name="Rectangle 137"/>
           <p:cNvSpPr/>
           <p:nvPr/>
         </p:nvSpPr>
@@ -9673,7 +9393,7 @@
       </p:sp>
       <p:sp>
         <p:nvSpPr>
-          <p:cNvPr id="147" name="Rounded Rectangle 146"/>
+          <p:cNvPr id="139" name="Rounded Rectangle 138"/>
           <p:cNvSpPr/>
           <p:nvPr/>
         </p:nvSpPr>
@@ -9719,7 +9439,7 @@
       </p:sp>
       <p:sp>
         <p:nvSpPr>
-          <p:cNvPr id="148" name="Rectangle 147"/>
+          <p:cNvPr id="140" name="Rectangle 139"/>
           <p:cNvSpPr/>
           <p:nvPr/>
         </p:nvSpPr>
@@ -9769,7 +9489,7 @@
       </p:sp>
       <p:sp>
         <p:nvSpPr>
-          <p:cNvPr id="149" name="Pentagon 148"/>
+          <p:cNvPr id="141" name="Pentagon 140"/>
           <p:cNvSpPr/>
           <p:nvPr/>
         </p:nvSpPr>
@@ -9815,7 +9535,7 @@
       </p:sp>
       <p:sp>
         <p:nvSpPr>
-          <p:cNvPr id="150" name="Rectangle 149"/>
+          <p:cNvPr id="142" name="Rectangle 141"/>
           <p:cNvSpPr/>
           <p:nvPr/>
         </p:nvSpPr>
@@ -9865,7 +9585,7 @@
       </p:sp>
       <p:sp>
         <p:nvSpPr>
-          <p:cNvPr id="151" name="Pentagon 150"/>
+          <p:cNvPr id="143" name="Pentagon 142"/>
           <p:cNvSpPr/>
           <p:nvPr/>
         </p:nvSpPr>
@@ -9911,7 +9631,7 @@
       </p:sp>
       <p:sp>
         <p:nvSpPr>
-          <p:cNvPr id="152" name="Rectangle 151"/>
+          <p:cNvPr id="144" name="Rectangle 143"/>
           <p:cNvSpPr/>
           <p:nvPr/>
         </p:nvSpPr>

--- a/roadmap.pptx
+++ b/roadmap.pptx
@@ -8288,7 +8288,7 @@
         </p:nvSpPr>
         <p:spPr>
           <a:xfrm>
-            <a:off x="7433717" y="1243584"/>
+            <a:off x="7433717" y="1865376"/>
             <a:ext cx="146304" cy="146304"/>
           </a:xfrm>
           <a:prstGeom prst="diamond">
@@ -8380,7 +8380,7 @@
         </p:nvSpPr>
         <p:spPr>
           <a:xfrm>
-            <a:off x="8547769" y="2176272"/>
+            <a:off x="8547769" y="2798064"/>
             <a:ext cx="146304" cy="146304"/>
           </a:xfrm>
           <a:prstGeom prst="diamond">
@@ -8472,7 +8472,7 @@
         </p:nvSpPr>
         <p:spPr>
           <a:xfrm>
-            <a:off x="10775873" y="3108960"/>
+            <a:off x="10775873" y="3730752"/>
             <a:ext cx="146304" cy="146304"/>
           </a:xfrm>
           <a:prstGeom prst="diamond">
@@ -8564,7 +8564,7 @@
         </p:nvSpPr>
         <p:spPr>
           <a:xfrm>
-            <a:off x="11889925" y="4041648"/>
+            <a:off x="11889925" y="4663440"/>
             <a:ext cx="146304" cy="146304"/>
           </a:xfrm>
           <a:prstGeom prst="diamond">
